--- a/references/画图.pptx
+++ b/references/画图.pptx
@@ -6,6 +6,7 @@
   </p:sldMasterIdLst>
   <p:sldIdLst>
     <p:sldId id="256" r:id="rId2"/>
+    <p:sldId id="258" r:id="rId3"/>
   </p:sldIdLst>
   <p:sldSz cx="12192000" cy="6858000"/>
   <p:notesSz cx="6858000" cy="9144000"/>
@@ -270,7 +271,7 @@
           <a:p>
             <a:fld id="{115BA0BE-EEFE-44F5-956C-0B3C1679C7A2}" type="datetimeFigureOut">
               <a:rPr lang="zh-CN" altLang="en-US" smtClean="0"/>
-              <a:t>2025/11/17</a:t>
+              <a:t>2026/3/13</a:t>
             </a:fld>
             <a:endParaRPr lang="zh-CN" altLang="en-US"/>
           </a:p>
@@ -468,7 +469,7 @@
           <a:p>
             <a:fld id="{115BA0BE-EEFE-44F5-956C-0B3C1679C7A2}" type="datetimeFigureOut">
               <a:rPr lang="zh-CN" altLang="en-US" smtClean="0"/>
-              <a:t>2025/11/17</a:t>
+              <a:t>2026/3/13</a:t>
             </a:fld>
             <a:endParaRPr lang="zh-CN" altLang="en-US"/>
           </a:p>
@@ -676,7 +677,7 @@
           <a:p>
             <a:fld id="{115BA0BE-EEFE-44F5-956C-0B3C1679C7A2}" type="datetimeFigureOut">
               <a:rPr lang="zh-CN" altLang="en-US" smtClean="0"/>
-              <a:t>2025/11/17</a:t>
+              <a:t>2026/3/13</a:t>
             </a:fld>
             <a:endParaRPr lang="zh-CN" altLang="en-US"/>
           </a:p>
@@ -874,7 +875,7 @@
           <a:p>
             <a:fld id="{115BA0BE-EEFE-44F5-956C-0B3C1679C7A2}" type="datetimeFigureOut">
               <a:rPr lang="zh-CN" altLang="en-US" smtClean="0"/>
-              <a:t>2025/11/17</a:t>
+              <a:t>2026/3/13</a:t>
             </a:fld>
             <a:endParaRPr lang="zh-CN" altLang="en-US"/>
           </a:p>
@@ -1149,7 +1150,7 @@
           <a:p>
             <a:fld id="{115BA0BE-EEFE-44F5-956C-0B3C1679C7A2}" type="datetimeFigureOut">
               <a:rPr lang="zh-CN" altLang="en-US" smtClean="0"/>
-              <a:t>2025/11/17</a:t>
+              <a:t>2026/3/13</a:t>
             </a:fld>
             <a:endParaRPr lang="zh-CN" altLang="en-US"/>
           </a:p>
@@ -1414,7 +1415,7 @@
           <a:p>
             <a:fld id="{115BA0BE-EEFE-44F5-956C-0B3C1679C7A2}" type="datetimeFigureOut">
               <a:rPr lang="zh-CN" altLang="en-US" smtClean="0"/>
-              <a:t>2025/11/17</a:t>
+              <a:t>2026/3/13</a:t>
             </a:fld>
             <a:endParaRPr lang="zh-CN" altLang="en-US"/>
           </a:p>
@@ -1826,7 +1827,7 @@
           <a:p>
             <a:fld id="{115BA0BE-EEFE-44F5-956C-0B3C1679C7A2}" type="datetimeFigureOut">
               <a:rPr lang="zh-CN" altLang="en-US" smtClean="0"/>
-              <a:t>2025/11/17</a:t>
+              <a:t>2026/3/13</a:t>
             </a:fld>
             <a:endParaRPr lang="zh-CN" altLang="en-US"/>
           </a:p>
@@ -1967,7 +1968,7 @@
           <a:p>
             <a:fld id="{115BA0BE-EEFE-44F5-956C-0B3C1679C7A2}" type="datetimeFigureOut">
               <a:rPr lang="zh-CN" altLang="en-US" smtClean="0"/>
-              <a:t>2025/11/17</a:t>
+              <a:t>2026/3/13</a:t>
             </a:fld>
             <a:endParaRPr lang="zh-CN" altLang="en-US"/>
           </a:p>
@@ -2080,7 +2081,7 @@
           <a:p>
             <a:fld id="{115BA0BE-EEFE-44F5-956C-0B3C1679C7A2}" type="datetimeFigureOut">
               <a:rPr lang="zh-CN" altLang="en-US" smtClean="0"/>
-              <a:t>2025/11/17</a:t>
+              <a:t>2026/3/13</a:t>
             </a:fld>
             <a:endParaRPr lang="zh-CN" altLang="en-US"/>
           </a:p>
@@ -2391,7 +2392,7 @@
           <a:p>
             <a:fld id="{115BA0BE-EEFE-44F5-956C-0B3C1679C7A2}" type="datetimeFigureOut">
               <a:rPr lang="zh-CN" altLang="en-US" smtClean="0"/>
-              <a:t>2025/11/17</a:t>
+              <a:t>2026/3/13</a:t>
             </a:fld>
             <a:endParaRPr lang="zh-CN" altLang="en-US"/>
           </a:p>
@@ -2679,7 +2680,7 @@
           <a:p>
             <a:fld id="{115BA0BE-EEFE-44F5-956C-0B3C1679C7A2}" type="datetimeFigureOut">
               <a:rPr lang="zh-CN" altLang="en-US" smtClean="0"/>
-              <a:t>2025/11/17</a:t>
+              <a:t>2026/3/13</a:t>
             </a:fld>
             <a:endParaRPr lang="zh-CN" altLang="en-US"/>
           </a:p>
@@ -2920,7 +2921,7 @@
           <a:p>
             <a:fld id="{115BA0BE-EEFE-44F5-956C-0B3C1679C7A2}" type="datetimeFigureOut">
               <a:rPr lang="zh-CN" altLang="en-US" smtClean="0"/>
-              <a:t>2025/11/17</a:t>
+              <a:t>2026/3/13</a:t>
             </a:fld>
             <a:endParaRPr lang="zh-CN" altLang="en-US"/>
           </a:p>
@@ -3725,196 +3726,6 @@
           </a:p>
         </p:txBody>
       </p:sp>
-      <p:sp>
-        <p:nvSpPr>
-          <p:cNvPr id="16" name="文本框 15">
-            <a:extLst>
-              <a:ext uri="{FF2B5EF4-FFF2-40B4-BE49-F238E27FC236}">
-                <a16:creationId xmlns:a16="http://schemas.microsoft.com/office/drawing/2014/main" id="{4AE0AD8A-DE6C-E8C6-FB41-DC3048D76002}"/>
-              </a:ext>
-            </a:extLst>
-          </p:cNvPr>
-          <p:cNvSpPr txBox="1"/>
-          <p:nvPr/>
-        </p:nvSpPr>
-        <p:spPr>
-          <a:xfrm>
-            <a:off x="4852738" y="1373685"/>
-            <a:ext cx="609599" cy="461665"/>
-          </a:xfrm>
-          <a:prstGeom prst="rect">
-            <a:avLst/>
-          </a:prstGeom>
-          <a:noFill/>
-        </p:spPr>
-        <p:txBody>
-          <a:bodyPr wrap="square" rtlCol="0">
-            <a:spAutoFit/>
-          </a:bodyPr>
-          <a:lstStyle/>
-          <a:p>
-            <a:r>
-              <a:rPr lang="en-US" altLang="zh-CN" sz="2400" b="1" dirty="0">
-                <a:latin typeface="黑体" panose="02010609060101010101" pitchFamily="49" charset="-122"/>
-                <a:ea typeface="黑体" panose="02010609060101010101" pitchFamily="49" charset="-122"/>
-              </a:rPr>
-              <a:t>B1</a:t>
-            </a:r>
-          </a:p>
-        </p:txBody>
-      </p:sp>
-      <p:sp>
-        <p:nvSpPr>
-          <p:cNvPr id="17" name="文本框 16">
-            <a:extLst>
-              <a:ext uri="{FF2B5EF4-FFF2-40B4-BE49-F238E27FC236}">
-                <a16:creationId xmlns:a16="http://schemas.microsoft.com/office/drawing/2014/main" id="{017DDBF4-BDFF-9256-DFDB-F7FE61C65DEF}"/>
-              </a:ext>
-            </a:extLst>
-          </p:cNvPr>
-          <p:cNvSpPr txBox="1"/>
-          <p:nvPr/>
-        </p:nvSpPr>
-        <p:spPr>
-          <a:xfrm>
-            <a:off x="6490755" y="1834811"/>
-            <a:ext cx="609599" cy="461665"/>
-          </a:xfrm>
-          <a:prstGeom prst="rect">
-            <a:avLst/>
-          </a:prstGeom>
-          <a:noFill/>
-        </p:spPr>
-        <p:txBody>
-          <a:bodyPr wrap="square" rtlCol="0">
-            <a:spAutoFit/>
-          </a:bodyPr>
-          <a:lstStyle/>
-          <a:p>
-            <a:r>
-              <a:rPr lang="en-US" altLang="zh-CN" sz="2400" b="1" dirty="0">
-                <a:latin typeface="黑体" panose="02010609060101010101" pitchFamily="49" charset="-122"/>
-                <a:ea typeface="黑体" panose="02010609060101010101" pitchFamily="49" charset="-122"/>
-              </a:rPr>
-              <a:t>B2</a:t>
-            </a:r>
-          </a:p>
-        </p:txBody>
-      </p:sp>
-      <p:sp>
-        <p:nvSpPr>
-          <p:cNvPr id="18" name="文本框 17">
-            <a:extLst>
-              <a:ext uri="{FF2B5EF4-FFF2-40B4-BE49-F238E27FC236}">
-                <a16:creationId xmlns:a16="http://schemas.microsoft.com/office/drawing/2014/main" id="{660B3154-758A-3965-2822-50289BE78C2A}"/>
-              </a:ext>
-            </a:extLst>
-          </p:cNvPr>
-          <p:cNvSpPr txBox="1"/>
-          <p:nvPr/>
-        </p:nvSpPr>
-        <p:spPr>
-          <a:xfrm>
-            <a:off x="6723336" y="718553"/>
-            <a:ext cx="609599" cy="461665"/>
-          </a:xfrm>
-          <a:prstGeom prst="rect">
-            <a:avLst/>
-          </a:prstGeom>
-          <a:noFill/>
-        </p:spPr>
-        <p:txBody>
-          <a:bodyPr wrap="square" rtlCol="0">
-            <a:spAutoFit/>
-          </a:bodyPr>
-          <a:lstStyle/>
-          <a:p>
-            <a:r>
-              <a:rPr lang="en-US" altLang="zh-CN" sz="2400" b="1" dirty="0">
-                <a:latin typeface="黑体" panose="02010609060101010101" pitchFamily="49" charset="-122"/>
-                <a:ea typeface="黑体" panose="02010609060101010101" pitchFamily="49" charset="-122"/>
-              </a:rPr>
-              <a:t>B3</a:t>
-            </a:r>
-          </a:p>
-        </p:txBody>
-      </p:sp>
-      <p:sp>
-        <p:nvSpPr>
-          <p:cNvPr id="19" name="文本框 18">
-            <a:extLst>
-              <a:ext uri="{FF2B5EF4-FFF2-40B4-BE49-F238E27FC236}">
-                <a16:creationId xmlns:a16="http://schemas.microsoft.com/office/drawing/2014/main" id="{9239557F-645A-3B7A-D9F6-418B9767B591}"/>
-              </a:ext>
-            </a:extLst>
-          </p:cNvPr>
-          <p:cNvSpPr txBox="1"/>
-          <p:nvPr/>
-        </p:nvSpPr>
-        <p:spPr>
-          <a:xfrm>
-            <a:off x="2322030" y="1950719"/>
-            <a:ext cx="609599" cy="461665"/>
-          </a:xfrm>
-          <a:prstGeom prst="rect">
-            <a:avLst/>
-          </a:prstGeom>
-          <a:noFill/>
-        </p:spPr>
-        <p:txBody>
-          <a:bodyPr wrap="square" rtlCol="0">
-            <a:spAutoFit/>
-          </a:bodyPr>
-          <a:lstStyle/>
-          <a:p>
-            <a:r>
-              <a:rPr lang="en-US" altLang="zh-CN" sz="2400" b="1" dirty="0">
-                <a:latin typeface="黑体" panose="02010609060101010101" pitchFamily="49" charset="-122"/>
-                <a:ea typeface="黑体" panose="02010609060101010101" pitchFamily="49" charset="-122"/>
-              </a:rPr>
-              <a:t>A1</a:t>
-            </a:r>
-          </a:p>
-        </p:txBody>
-      </p:sp>
-      <p:sp>
-        <p:nvSpPr>
-          <p:cNvPr id="20" name="文本框 19">
-            <a:extLst>
-              <a:ext uri="{FF2B5EF4-FFF2-40B4-BE49-F238E27FC236}">
-                <a16:creationId xmlns:a16="http://schemas.microsoft.com/office/drawing/2014/main" id="{FAD4E744-849F-4525-B931-9C89ED95A87A}"/>
-              </a:ext>
-            </a:extLst>
-          </p:cNvPr>
-          <p:cNvSpPr txBox="1"/>
-          <p:nvPr/>
-        </p:nvSpPr>
-        <p:spPr>
-          <a:xfrm>
-            <a:off x="6096000" y="5761121"/>
-            <a:ext cx="609599" cy="461665"/>
-          </a:xfrm>
-          <a:prstGeom prst="rect">
-            <a:avLst/>
-          </a:prstGeom>
-          <a:noFill/>
-        </p:spPr>
-        <p:txBody>
-          <a:bodyPr wrap="square" rtlCol="0">
-            <a:spAutoFit/>
-          </a:bodyPr>
-          <a:lstStyle/>
-          <a:p>
-            <a:r>
-              <a:rPr lang="en-US" altLang="zh-CN" sz="2400" b="1" dirty="0">
-                <a:latin typeface="黑体" panose="02010609060101010101" pitchFamily="49" charset="-122"/>
-                <a:ea typeface="黑体" panose="02010609060101010101" pitchFamily="49" charset="-122"/>
-              </a:rPr>
-              <a:t>K1</a:t>
-            </a:r>
-          </a:p>
-        </p:txBody>
-      </p:sp>
       <p:cxnSp>
         <p:nvCxnSpPr>
           <p:cNvPr id="24" name="直接箭头连接符 23">
@@ -4046,12 +3857,795 @@
           </a:fontRef>
         </p:style>
       </p:cxnSp>
-      <p:sp>
-        <p:nvSpPr>
-          <p:cNvPr id="29" name="文本框 28">
-            <a:extLst>
-              <a:ext uri="{FF2B5EF4-FFF2-40B4-BE49-F238E27FC236}">
-                <a16:creationId xmlns:a16="http://schemas.microsoft.com/office/drawing/2014/main" id="{DE535EA7-52E8-1FD7-4E79-08B2AE348732}"/>
+      <p:graphicFrame>
+        <p:nvGraphicFramePr>
+          <p:cNvPr id="3" name="对象 2">
+            <a:extLst>
+              <a:ext uri="{FF2B5EF4-FFF2-40B4-BE49-F238E27FC236}">
+                <a16:creationId xmlns:a16="http://schemas.microsoft.com/office/drawing/2014/main" id="{0A9A211D-4630-910B-831C-586E2FC28F2B}"/>
+              </a:ext>
+            </a:extLst>
+          </p:cNvPr>
+          <p:cNvGraphicFramePr>
+            <a:graphicFrameLocks noChangeAspect="1"/>
+          </p:cNvGraphicFramePr>
+          <p:nvPr>
+            <p:extLst>
+              <p:ext uri="{D42A27DB-BD31-4B8C-83A1-F6EECF244321}">
+                <p14:modId xmlns:p14="http://schemas.microsoft.com/office/powerpoint/2010/main" val="1718580989"/>
+              </p:ext>
+            </p:extLst>
+          </p:nvPr>
+        </p:nvGraphicFramePr>
+        <p:xfrm>
+          <a:off x="4830201" y="1242862"/>
+          <a:ext cx="498921" cy="690813"/>
+        </p:xfrm>
+        <a:graphic>
+          <a:graphicData uri="http://schemas.openxmlformats.org/presentationml/2006/ole">
+            <mc:AlternateContent xmlns:mc="http://schemas.openxmlformats.org/markup-compatibility/2006">
+              <mc:Choice xmlns:v="urn:schemas-microsoft-com:vml" Requires="v">
+                <p:oleObj name="Equation" r:id="rId3" imgW="164880" imgH="228600" progId="Equation.DSMT4">
+                  <p:embed/>
+                </p:oleObj>
+              </mc:Choice>
+              <mc:Fallback>
+                <p:oleObj name="Equation" r:id="rId3" imgW="164880" imgH="228600" progId="Equation.DSMT4">
+                  <p:embed/>
+                  <p:pic>
+                    <p:nvPicPr>
+                      <p:cNvPr id="0" name=""/>
+                      <p:cNvPicPr/>
+                      <p:nvPr/>
+                    </p:nvPicPr>
+                    <p:blipFill>
+                      <a:blip r:embed="rId4"/>
+                      <a:stretch>
+                        <a:fillRect/>
+                      </a:stretch>
+                    </p:blipFill>
+                    <p:spPr>
+                      <a:xfrm>
+                        <a:off x="4830201" y="1242862"/>
+                        <a:ext cx="498921" cy="690813"/>
+                      </a:xfrm>
+                      <a:prstGeom prst="rect">
+                        <a:avLst/>
+                      </a:prstGeom>
+                    </p:spPr>
+                  </p:pic>
+                </p:oleObj>
+              </mc:Fallback>
+            </mc:AlternateContent>
+          </a:graphicData>
+        </a:graphic>
+      </p:graphicFrame>
+      <p:graphicFrame>
+        <p:nvGraphicFramePr>
+          <p:cNvPr id="4" name="对象 3">
+            <a:extLst>
+              <a:ext uri="{FF2B5EF4-FFF2-40B4-BE49-F238E27FC236}">
+                <a16:creationId xmlns:a16="http://schemas.microsoft.com/office/drawing/2014/main" id="{0D99C24C-5F36-498F-A2E8-6283B57EA2A4}"/>
+              </a:ext>
+            </a:extLst>
+          </p:cNvPr>
+          <p:cNvGraphicFramePr>
+            <a:graphicFrameLocks noChangeAspect="1"/>
+          </p:cNvGraphicFramePr>
+          <p:nvPr>
+            <p:extLst>
+              <p:ext uri="{D42A27DB-BD31-4B8C-83A1-F6EECF244321}">
+                <p14:modId xmlns:p14="http://schemas.microsoft.com/office/powerpoint/2010/main" val="844002752"/>
+              </p:ext>
+            </p:extLst>
+          </p:nvPr>
+        </p:nvGraphicFramePr>
+        <p:xfrm>
+          <a:off x="5844755" y="1311041"/>
+          <a:ext cx="441763" cy="478576"/>
+        </p:xfrm>
+        <a:graphic>
+          <a:graphicData uri="http://schemas.openxmlformats.org/presentationml/2006/ole">
+            <mc:AlternateContent xmlns:mc="http://schemas.openxmlformats.org/markup-compatibility/2006">
+              <mc:Choice xmlns:v="urn:schemas-microsoft-com:vml" Requires="v">
+                <p:oleObj name="Equation" r:id="rId5" imgW="152280" imgH="164880" progId="Equation.DSMT4">
+                  <p:embed/>
+                </p:oleObj>
+              </mc:Choice>
+              <mc:Fallback>
+                <p:oleObj name="Equation" r:id="rId5" imgW="152280" imgH="164880" progId="Equation.DSMT4">
+                  <p:embed/>
+                  <p:pic>
+                    <p:nvPicPr>
+                      <p:cNvPr id="0" name=""/>
+                      <p:cNvPicPr/>
+                      <p:nvPr/>
+                    </p:nvPicPr>
+                    <p:blipFill>
+                      <a:blip r:embed="rId6"/>
+                      <a:stretch>
+                        <a:fillRect/>
+                      </a:stretch>
+                    </p:blipFill>
+                    <p:spPr>
+                      <a:xfrm>
+                        <a:off x="5844755" y="1311041"/>
+                        <a:ext cx="441763" cy="478576"/>
+                      </a:xfrm>
+                      <a:prstGeom prst="rect">
+                        <a:avLst/>
+                      </a:prstGeom>
+                    </p:spPr>
+                  </p:pic>
+                </p:oleObj>
+              </mc:Fallback>
+            </mc:AlternateContent>
+          </a:graphicData>
+        </a:graphic>
+      </p:graphicFrame>
+      <p:graphicFrame>
+        <p:nvGraphicFramePr>
+          <p:cNvPr id="5" name="对象 4">
+            <a:extLst>
+              <a:ext uri="{FF2B5EF4-FFF2-40B4-BE49-F238E27FC236}">
+                <a16:creationId xmlns:a16="http://schemas.microsoft.com/office/drawing/2014/main" id="{3676E2F9-A418-26B9-D6F2-36FC490A4E48}"/>
+              </a:ext>
+            </a:extLst>
+          </p:cNvPr>
+          <p:cNvGraphicFramePr>
+            <a:graphicFrameLocks noChangeAspect="1"/>
+          </p:cNvGraphicFramePr>
+          <p:nvPr>
+            <p:extLst>
+              <p:ext uri="{D42A27DB-BD31-4B8C-83A1-F6EECF244321}">
+                <p14:modId xmlns:p14="http://schemas.microsoft.com/office/powerpoint/2010/main" val="3220212430"/>
+              </p:ext>
+            </p:extLst>
+          </p:nvPr>
+        </p:nvGraphicFramePr>
+        <p:xfrm>
+          <a:off x="6679621" y="5800499"/>
+          <a:ext cx="341007" cy="341007"/>
+        </p:xfrm>
+        <a:graphic>
+          <a:graphicData uri="http://schemas.openxmlformats.org/presentationml/2006/ole">
+            <mc:AlternateContent xmlns:mc="http://schemas.openxmlformats.org/markup-compatibility/2006">
+              <mc:Choice xmlns:v="urn:schemas-microsoft-com:vml" Requires="v">
+                <p:oleObj name="Equation" r:id="rId7" imgW="164880" imgH="164880" progId="Equation.DSMT4">
+                  <p:embed/>
+                </p:oleObj>
+              </mc:Choice>
+              <mc:Fallback>
+                <p:oleObj name="Equation" r:id="rId7" imgW="164880" imgH="164880" progId="Equation.DSMT4">
+                  <p:embed/>
+                  <p:pic>
+                    <p:nvPicPr>
+                      <p:cNvPr id="0" name=""/>
+                      <p:cNvPicPr/>
+                      <p:nvPr/>
+                    </p:nvPicPr>
+                    <p:blipFill>
+                      <a:blip r:embed="rId8"/>
+                      <a:stretch>
+                        <a:fillRect/>
+                      </a:stretch>
+                    </p:blipFill>
+                    <p:spPr>
+                      <a:xfrm>
+                        <a:off x="6679621" y="5800499"/>
+                        <a:ext cx="341007" cy="341007"/>
+                      </a:xfrm>
+                      <a:prstGeom prst="rect">
+                        <a:avLst/>
+                      </a:prstGeom>
+                    </p:spPr>
+                  </p:pic>
+                </p:oleObj>
+              </mc:Fallback>
+            </mc:AlternateContent>
+          </a:graphicData>
+        </a:graphic>
+      </p:graphicFrame>
+      <p:graphicFrame>
+        <p:nvGraphicFramePr>
+          <p:cNvPr id="7" name="对象 6">
+            <a:extLst>
+              <a:ext uri="{FF2B5EF4-FFF2-40B4-BE49-F238E27FC236}">
+                <a16:creationId xmlns:a16="http://schemas.microsoft.com/office/drawing/2014/main" id="{2C1C6EB6-FE35-FBC4-9F95-8072C80EFE8B}"/>
+              </a:ext>
+            </a:extLst>
+          </p:cNvPr>
+          <p:cNvGraphicFramePr>
+            <a:graphicFrameLocks noChangeAspect="1"/>
+          </p:cNvGraphicFramePr>
+          <p:nvPr>
+            <p:extLst>
+              <p:ext uri="{D42A27DB-BD31-4B8C-83A1-F6EECF244321}">
+                <p14:modId xmlns:p14="http://schemas.microsoft.com/office/powerpoint/2010/main" val="2339212522"/>
+              </p:ext>
+            </p:extLst>
+          </p:nvPr>
+        </p:nvGraphicFramePr>
+        <p:xfrm>
+          <a:off x="5997959" y="5714225"/>
+          <a:ext cx="434076" cy="520892"/>
+        </p:xfrm>
+        <a:graphic>
+          <a:graphicData uri="http://schemas.openxmlformats.org/presentationml/2006/ole">
+            <mc:AlternateContent xmlns:mc="http://schemas.openxmlformats.org/markup-compatibility/2006">
+              <mc:Choice xmlns:v="urn:schemas-microsoft-com:vml" Requires="v">
+                <p:oleObj name="Equation" r:id="rId9" imgW="190440" imgH="228600" progId="Equation.DSMT4">
+                  <p:embed/>
+                </p:oleObj>
+              </mc:Choice>
+              <mc:Fallback>
+                <p:oleObj name="Equation" r:id="rId9" imgW="190440" imgH="228600" progId="Equation.DSMT4">
+                  <p:embed/>
+                  <p:pic>
+                    <p:nvPicPr>
+                      <p:cNvPr id="0" name=""/>
+                      <p:cNvPicPr/>
+                      <p:nvPr/>
+                    </p:nvPicPr>
+                    <p:blipFill>
+                      <a:blip r:embed="rId10"/>
+                      <a:stretch>
+                        <a:fillRect/>
+                      </a:stretch>
+                    </p:blipFill>
+                    <p:spPr>
+                      <a:xfrm>
+                        <a:off x="5997959" y="5714225"/>
+                        <a:ext cx="434076" cy="520892"/>
+                      </a:xfrm>
+                      <a:prstGeom prst="rect">
+                        <a:avLst/>
+                      </a:prstGeom>
+                    </p:spPr>
+                  </p:pic>
+                </p:oleObj>
+              </mc:Fallback>
+            </mc:AlternateContent>
+          </a:graphicData>
+        </a:graphic>
+      </p:graphicFrame>
+      <p:graphicFrame>
+        <p:nvGraphicFramePr>
+          <p:cNvPr id="9" name="对象 8">
+            <a:extLst>
+              <a:ext uri="{FF2B5EF4-FFF2-40B4-BE49-F238E27FC236}">
+                <a16:creationId xmlns:a16="http://schemas.microsoft.com/office/drawing/2014/main" id="{659872F5-9E59-2509-CE96-76AB46DE8397}"/>
+              </a:ext>
+            </a:extLst>
+          </p:cNvPr>
+          <p:cNvGraphicFramePr>
+            <a:graphicFrameLocks noChangeAspect="1"/>
+          </p:cNvGraphicFramePr>
+          <p:nvPr>
+            <p:extLst>
+              <p:ext uri="{D42A27DB-BD31-4B8C-83A1-F6EECF244321}">
+                <p14:modId xmlns:p14="http://schemas.microsoft.com/office/powerpoint/2010/main" val="443654248"/>
+              </p:ext>
+            </p:extLst>
+          </p:nvPr>
+        </p:nvGraphicFramePr>
+        <p:xfrm>
+          <a:off x="4055104" y="3831235"/>
+          <a:ext cx="325842" cy="651684"/>
+        </p:xfrm>
+        <a:graphic>
+          <a:graphicData uri="http://schemas.openxmlformats.org/presentationml/2006/ole">
+            <mc:AlternateContent xmlns:mc="http://schemas.openxmlformats.org/markup-compatibility/2006">
+              <mc:Choice xmlns:v="urn:schemas-microsoft-com:vml" Requires="v">
+                <p:oleObj name="Equation" r:id="rId11" imgW="114120" imgH="228600" progId="Equation.DSMT4">
+                  <p:embed/>
+                </p:oleObj>
+              </mc:Choice>
+              <mc:Fallback>
+                <p:oleObj name="Equation" r:id="rId11" imgW="114120" imgH="228600" progId="Equation.DSMT4">
+                  <p:embed/>
+                  <p:pic>
+                    <p:nvPicPr>
+                      <p:cNvPr id="0" name=""/>
+                      <p:cNvPicPr/>
+                      <p:nvPr/>
+                    </p:nvPicPr>
+                    <p:blipFill>
+                      <a:blip r:embed="rId12"/>
+                      <a:stretch>
+                        <a:fillRect/>
+                      </a:stretch>
+                    </p:blipFill>
+                    <p:spPr>
+                      <a:xfrm>
+                        <a:off x="4055104" y="3831235"/>
+                        <a:ext cx="325842" cy="651684"/>
+                      </a:xfrm>
+                      <a:prstGeom prst="rect">
+                        <a:avLst/>
+                      </a:prstGeom>
+                    </p:spPr>
+                  </p:pic>
+                </p:oleObj>
+              </mc:Fallback>
+            </mc:AlternateContent>
+          </a:graphicData>
+        </a:graphic>
+      </p:graphicFrame>
+      <p:graphicFrame>
+        <p:nvGraphicFramePr>
+          <p:cNvPr id="22" name="对象 21">
+            <a:extLst>
+              <a:ext uri="{FF2B5EF4-FFF2-40B4-BE49-F238E27FC236}">
+                <a16:creationId xmlns:a16="http://schemas.microsoft.com/office/drawing/2014/main" id="{37B47B72-D1C7-C250-9634-CC14A068CE24}"/>
+              </a:ext>
+            </a:extLst>
+          </p:cNvPr>
+          <p:cNvGraphicFramePr>
+            <a:graphicFrameLocks noChangeAspect="1"/>
+          </p:cNvGraphicFramePr>
+          <p:nvPr>
+            <p:extLst>
+              <p:ext uri="{D42A27DB-BD31-4B8C-83A1-F6EECF244321}">
+                <p14:modId xmlns:p14="http://schemas.microsoft.com/office/powerpoint/2010/main" val="972080306"/>
+              </p:ext>
+            </p:extLst>
+          </p:nvPr>
+        </p:nvGraphicFramePr>
+        <p:xfrm>
+          <a:off x="3821163" y="1311041"/>
+          <a:ext cx="396861" cy="595292"/>
+        </p:xfrm>
+        <a:graphic>
+          <a:graphicData uri="http://schemas.openxmlformats.org/presentationml/2006/ole">
+            <mc:AlternateContent xmlns:mc="http://schemas.openxmlformats.org/markup-compatibility/2006">
+              <mc:Choice xmlns:v="urn:schemas-microsoft-com:vml" Requires="v">
+                <p:oleObj name="Equation" r:id="rId13" imgW="152280" imgH="228600" progId="Equation.DSMT4">
+                  <p:embed/>
+                </p:oleObj>
+              </mc:Choice>
+              <mc:Fallback>
+                <p:oleObj name="Equation" r:id="rId13" imgW="152280" imgH="228600" progId="Equation.DSMT4">
+                  <p:embed/>
+                  <p:pic>
+                    <p:nvPicPr>
+                      <p:cNvPr id="0" name=""/>
+                      <p:cNvPicPr/>
+                      <p:nvPr/>
+                    </p:nvPicPr>
+                    <p:blipFill>
+                      <a:blip r:embed="rId14"/>
+                      <a:stretch>
+                        <a:fillRect/>
+                      </a:stretch>
+                    </p:blipFill>
+                    <p:spPr>
+                      <a:xfrm>
+                        <a:off x="3821163" y="1311041"/>
+                        <a:ext cx="396861" cy="595292"/>
+                      </a:xfrm>
+                      <a:prstGeom prst="rect">
+                        <a:avLst/>
+                      </a:prstGeom>
+                    </p:spPr>
+                  </p:pic>
+                </p:oleObj>
+              </mc:Fallback>
+            </mc:AlternateContent>
+          </a:graphicData>
+        </a:graphic>
+      </p:graphicFrame>
+      <p:graphicFrame>
+        <p:nvGraphicFramePr>
+          <p:cNvPr id="23" name="对象 22">
+            <a:extLst>
+              <a:ext uri="{FF2B5EF4-FFF2-40B4-BE49-F238E27FC236}">
+                <a16:creationId xmlns:a16="http://schemas.microsoft.com/office/drawing/2014/main" id="{2C298EC6-AFAB-AB9B-C906-9EABB2C0A0E3}"/>
+              </a:ext>
+            </a:extLst>
+          </p:cNvPr>
+          <p:cNvGraphicFramePr>
+            <a:graphicFrameLocks noChangeAspect="1"/>
+          </p:cNvGraphicFramePr>
+          <p:nvPr>
+            <p:extLst>
+              <p:ext uri="{D42A27DB-BD31-4B8C-83A1-F6EECF244321}">
+                <p14:modId xmlns:p14="http://schemas.microsoft.com/office/powerpoint/2010/main" val="2594433369"/>
+              </p:ext>
+            </p:extLst>
+          </p:nvPr>
+        </p:nvGraphicFramePr>
+        <p:xfrm>
+          <a:off x="2310554" y="1719962"/>
+          <a:ext cx="441380" cy="611142"/>
+        </p:xfrm>
+        <a:graphic>
+          <a:graphicData uri="http://schemas.openxmlformats.org/presentationml/2006/ole">
+            <mc:AlternateContent xmlns:mc="http://schemas.openxmlformats.org/markup-compatibility/2006">
+              <mc:Choice xmlns:v="urn:schemas-microsoft-com:vml" Requires="v">
+                <p:oleObj name="Equation" r:id="rId15" imgW="164880" imgH="228600" progId="Equation.DSMT4">
+                  <p:embed/>
+                </p:oleObj>
+              </mc:Choice>
+              <mc:Fallback>
+                <p:oleObj name="Equation" r:id="rId15" imgW="164880" imgH="228600" progId="Equation.DSMT4">
+                  <p:embed/>
+                  <p:pic>
+                    <p:nvPicPr>
+                      <p:cNvPr id="0" name=""/>
+                      <p:cNvPicPr/>
+                      <p:nvPr/>
+                    </p:nvPicPr>
+                    <p:blipFill>
+                      <a:blip r:embed="rId16"/>
+                      <a:stretch>
+                        <a:fillRect/>
+                      </a:stretch>
+                    </p:blipFill>
+                    <p:spPr>
+                      <a:xfrm>
+                        <a:off x="2310554" y="1719962"/>
+                        <a:ext cx="441380" cy="611142"/>
+                      </a:xfrm>
+                      <a:prstGeom prst="rect">
+                        <a:avLst/>
+                      </a:prstGeom>
+                    </p:spPr>
+                  </p:pic>
+                </p:oleObj>
+              </mc:Fallback>
+            </mc:AlternateContent>
+          </a:graphicData>
+        </a:graphic>
+      </p:graphicFrame>
+    </p:spTree>
+    <p:extLst>
+      <p:ext uri="{BB962C8B-B14F-4D97-AF65-F5344CB8AC3E}">
+        <p14:creationId xmlns:p14="http://schemas.microsoft.com/office/powerpoint/2010/main" val="2552100656"/>
+      </p:ext>
+    </p:extLst>
+  </p:cSld>
+  <p:clrMapOvr>
+    <a:masterClrMapping/>
+  </p:clrMapOvr>
+</p:sld>
+</file>
+
+<file path=ppt/slides/slide2.xml><?xml version="1.0" encoding="utf-8"?>
+<p:sld xmlns:a="http://schemas.openxmlformats.org/drawingml/2006/main" xmlns:r="http://schemas.openxmlformats.org/officeDocument/2006/relationships" xmlns:p="http://schemas.openxmlformats.org/presentationml/2006/main">
+  <p:cSld>
+    <p:spTree>
+      <p:nvGrpSpPr>
+        <p:cNvPr id="1" name="">
+          <a:extLst>
+            <a:ext uri="{FF2B5EF4-FFF2-40B4-BE49-F238E27FC236}">
+              <a16:creationId xmlns:a16="http://schemas.microsoft.com/office/drawing/2014/main" id="{4B4F1019-E866-8887-D5FD-485E5D7DEA26}"/>
+            </a:ext>
+          </a:extLst>
+        </p:cNvPr>
+        <p:cNvGrpSpPr/>
+        <p:nvPr/>
+      </p:nvGrpSpPr>
+      <p:grpSpPr>
+        <a:xfrm>
+          <a:off x="0" y="0"/>
+          <a:ext cx="0" cy="0"/>
+          <a:chOff x="0" y="0"/>
+          <a:chExt cx="0" cy="0"/>
+        </a:xfrm>
+      </p:grpSpPr>
+      <p:pic>
+        <p:nvPicPr>
+          <p:cNvPr id="21" name="图片 20">
+            <a:extLst>
+              <a:ext uri="{FF2B5EF4-FFF2-40B4-BE49-F238E27FC236}">
+                <a16:creationId xmlns:a16="http://schemas.microsoft.com/office/drawing/2014/main" id="{34F250EF-7613-DCCC-4574-54F108E869AE}"/>
+              </a:ext>
+            </a:extLst>
+          </p:cNvPr>
+          <p:cNvPicPr>
+            <a:picLocks noChangeAspect="1"/>
+          </p:cNvPicPr>
+          <p:nvPr/>
+        </p:nvPicPr>
+        <p:blipFill>
+          <a:blip r:embed="rId2">
+            <a:extLst>
+              <a:ext uri="{28A0092B-C50C-407E-A947-70E740481C1C}">
+                <a14:useLocalDpi xmlns:a14="http://schemas.microsoft.com/office/drawing/2010/main" val="0"/>
+              </a:ext>
+            </a:extLst>
+          </a:blip>
+          <a:srcRect/>
+          <a:stretch/>
+        </p:blipFill>
+        <p:spPr>
+          <a:xfrm>
+            <a:off x="400252" y="-208208"/>
+            <a:ext cx="11368237" cy="6430994"/>
+          </a:xfrm>
+          <a:prstGeom prst="rect">
+            <a:avLst/>
+          </a:prstGeom>
+        </p:spPr>
+      </p:pic>
+      <p:cxnSp>
+        <p:nvCxnSpPr>
+          <p:cNvPr id="6" name="直接箭头连接符 5">
+            <a:extLst>
+              <a:ext uri="{FF2B5EF4-FFF2-40B4-BE49-F238E27FC236}">
+                <a16:creationId xmlns:a16="http://schemas.microsoft.com/office/drawing/2014/main" id="{FB72AD7D-2954-6D9B-7BF2-9D2D4ACF9C0C}"/>
+              </a:ext>
+            </a:extLst>
+          </p:cNvPr>
+          <p:cNvCxnSpPr>
+            <a:cxnSpLocks/>
+          </p:cNvCxnSpPr>
+          <p:nvPr/>
+        </p:nvCxnSpPr>
+        <p:spPr>
+          <a:xfrm flipH="1">
+            <a:off x="5250010" y="2074138"/>
+            <a:ext cx="629488" cy="49822"/>
+          </a:xfrm>
+          <a:prstGeom prst="straightConnector1">
+            <a:avLst/>
+          </a:prstGeom>
+          <a:ln w="50800">
+            <a:solidFill>
+              <a:srgbClr val="FF0000"/>
+            </a:solidFill>
+            <a:tailEnd type="triangle"/>
+          </a:ln>
+        </p:spPr>
+        <p:style>
+          <a:lnRef idx="1">
+            <a:schemeClr val="accent1"/>
+          </a:lnRef>
+          <a:fillRef idx="0">
+            <a:schemeClr val="accent1"/>
+          </a:fillRef>
+          <a:effectRef idx="0">
+            <a:schemeClr val="accent1"/>
+          </a:effectRef>
+          <a:fontRef idx="minor">
+            <a:schemeClr val="tx1"/>
+          </a:fontRef>
+        </p:style>
+      </p:cxnSp>
+      <p:cxnSp>
+        <p:nvCxnSpPr>
+          <p:cNvPr id="8" name="直接箭头连接符 7">
+            <a:extLst>
+              <a:ext uri="{FF2B5EF4-FFF2-40B4-BE49-F238E27FC236}">
+                <a16:creationId xmlns:a16="http://schemas.microsoft.com/office/drawing/2014/main" id="{BA170842-DE5B-E4F3-9273-4109A36DAA3B}"/>
+              </a:ext>
+            </a:extLst>
+          </p:cNvPr>
+          <p:cNvCxnSpPr>
+            <a:cxnSpLocks/>
+            <a:stCxn id="11" idx="2"/>
+          </p:cNvCxnSpPr>
+          <p:nvPr/>
+        </p:nvCxnSpPr>
+        <p:spPr>
+          <a:xfrm flipH="1">
+            <a:off x="3848696" y="2113466"/>
+            <a:ext cx="1336027" cy="135213"/>
+          </a:xfrm>
+          <a:prstGeom prst="straightConnector1">
+            <a:avLst/>
+          </a:prstGeom>
+          <a:ln w="50800">
+            <a:solidFill>
+              <a:srgbClr val="FF0000"/>
+            </a:solidFill>
+            <a:tailEnd type="triangle"/>
+          </a:ln>
+        </p:spPr>
+        <p:style>
+          <a:lnRef idx="1">
+            <a:schemeClr val="accent1"/>
+          </a:lnRef>
+          <a:fillRef idx="0">
+            <a:schemeClr val="accent1"/>
+          </a:fillRef>
+          <a:effectRef idx="0">
+            <a:schemeClr val="accent1"/>
+          </a:effectRef>
+          <a:fontRef idx="minor">
+            <a:schemeClr val="tx1"/>
+          </a:fontRef>
+        </p:style>
+      </p:cxnSp>
+      <p:cxnSp>
+        <p:nvCxnSpPr>
+          <p:cNvPr id="10" name="直接箭头连接符 9">
+            <a:extLst>
+              <a:ext uri="{FF2B5EF4-FFF2-40B4-BE49-F238E27FC236}">
+                <a16:creationId xmlns:a16="http://schemas.microsoft.com/office/drawing/2014/main" id="{DAACF6B9-778A-8209-5359-8080F50901EE}"/>
+              </a:ext>
+            </a:extLst>
+          </p:cNvPr>
+          <p:cNvCxnSpPr>
+            <a:cxnSpLocks/>
+          </p:cNvCxnSpPr>
+          <p:nvPr/>
+        </p:nvCxnSpPr>
+        <p:spPr>
+          <a:xfrm>
+            <a:off x="3848696" y="2262925"/>
+            <a:ext cx="2184929" cy="1966187"/>
+          </a:xfrm>
+          <a:prstGeom prst="straightConnector1">
+            <a:avLst/>
+          </a:prstGeom>
+          <a:ln w="50800">
+            <a:solidFill>
+              <a:srgbClr val="FF0000"/>
+            </a:solidFill>
+            <a:tailEnd type="triangle"/>
+          </a:ln>
+        </p:spPr>
+        <p:style>
+          <a:lnRef idx="1">
+            <a:schemeClr val="accent1"/>
+          </a:lnRef>
+          <a:fillRef idx="0">
+            <a:schemeClr val="accent1"/>
+          </a:fillRef>
+          <a:effectRef idx="0">
+            <a:schemeClr val="accent1"/>
+          </a:effectRef>
+          <a:fontRef idx="minor">
+            <a:schemeClr val="tx1"/>
+          </a:fontRef>
+        </p:style>
+      </p:cxnSp>
+      <p:sp>
+        <p:nvSpPr>
+          <p:cNvPr id="11" name="流程图: 接点 10">
+            <a:extLst>
+              <a:ext uri="{FF2B5EF4-FFF2-40B4-BE49-F238E27FC236}">
+                <a16:creationId xmlns:a16="http://schemas.microsoft.com/office/drawing/2014/main" id="{6CAEBD35-A900-C00B-AB2E-34C15D19C73D}"/>
+              </a:ext>
+            </a:extLst>
+          </p:cNvPr>
+          <p:cNvSpPr/>
+          <p:nvPr/>
+        </p:nvSpPr>
+        <p:spPr>
+          <a:xfrm>
+            <a:off x="5184723" y="2079376"/>
+            <a:ext cx="60158" cy="68179"/>
+          </a:xfrm>
+          <a:prstGeom prst="flowChartConnector">
+            <a:avLst/>
+          </a:prstGeom>
+        </p:spPr>
+        <p:style>
+          <a:lnRef idx="2">
+            <a:schemeClr val="dk1">
+              <a:shade val="15000"/>
+            </a:schemeClr>
+          </a:lnRef>
+          <a:fillRef idx="1">
+            <a:schemeClr val="dk1"/>
+          </a:fillRef>
+          <a:effectRef idx="0">
+            <a:schemeClr val="dk1"/>
+          </a:effectRef>
+          <a:fontRef idx="minor">
+            <a:schemeClr val="lt1"/>
+          </a:fontRef>
+        </p:style>
+        <p:txBody>
+          <a:bodyPr rtlCol="0" anchor="ctr"/>
+          <a:lstStyle/>
+          <a:p>
+            <a:pPr algn="ctr"/>
+            <a:endParaRPr lang="zh-CN" altLang="en-US"/>
+          </a:p>
+        </p:txBody>
+      </p:sp>
+      <p:sp>
+        <p:nvSpPr>
+          <p:cNvPr id="13" name="流程图: 接点 12">
+            <a:extLst>
+              <a:ext uri="{FF2B5EF4-FFF2-40B4-BE49-F238E27FC236}">
+                <a16:creationId xmlns:a16="http://schemas.microsoft.com/office/drawing/2014/main" id="{B4C6A93A-0190-1CED-B15D-C20E84E85884}"/>
+              </a:ext>
+            </a:extLst>
+          </p:cNvPr>
+          <p:cNvSpPr/>
+          <p:nvPr/>
+        </p:nvSpPr>
+        <p:spPr>
+          <a:xfrm>
+            <a:off x="6943915" y="1242862"/>
+            <a:ext cx="60158" cy="68179"/>
+          </a:xfrm>
+          <a:prstGeom prst="flowChartConnector">
+            <a:avLst/>
+          </a:prstGeom>
+        </p:spPr>
+        <p:style>
+          <a:lnRef idx="2">
+            <a:schemeClr val="dk1">
+              <a:shade val="15000"/>
+            </a:schemeClr>
+          </a:lnRef>
+          <a:fillRef idx="1">
+            <a:schemeClr val="dk1"/>
+          </a:fillRef>
+          <a:effectRef idx="0">
+            <a:schemeClr val="dk1"/>
+          </a:effectRef>
+          <a:fontRef idx="minor">
+            <a:schemeClr val="lt1"/>
+          </a:fontRef>
+        </p:style>
+        <p:txBody>
+          <a:bodyPr rtlCol="0" anchor="ctr"/>
+          <a:lstStyle/>
+          <a:p>
+            <a:pPr algn="ctr"/>
+            <a:endParaRPr lang="zh-CN" altLang="en-US"/>
+          </a:p>
+        </p:txBody>
+      </p:sp>
+      <p:sp>
+        <p:nvSpPr>
+          <p:cNvPr id="14" name="流程图: 接点 13">
+            <a:extLst>
+              <a:ext uri="{FF2B5EF4-FFF2-40B4-BE49-F238E27FC236}">
+                <a16:creationId xmlns:a16="http://schemas.microsoft.com/office/drawing/2014/main" id="{90F2151F-05D3-B1FF-E17C-C6B1C486CDBF}"/>
+              </a:ext>
+            </a:extLst>
+          </p:cNvPr>
+          <p:cNvSpPr/>
+          <p:nvPr/>
+        </p:nvSpPr>
+        <p:spPr>
+          <a:xfrm>
+            <a:off x="3817805" y="2214589"/>
+            <a:ext cx="60158" cy="68179"/>
+          </a:xfrm>
+          <a:prstGeom prst="flowChartConnector">
+            <a:avLst/>
+          </a:prstGeom>
+        </p:spPr>
+        <p:style>
+          <a:lnRef idx="2">
+            <a:schemeClr val="dk1">
+              <a:shade val="15000"/>
+            </a:schemeClr>
+          </a:lnRef>
+          <a:fillRef idx="1">
+            <a:schemeClr val="dk1"/>
+          </a:fillRef>
+          <a:effectRef idx="0">
+            <a:schemeClr val="dk1"/>
+          </a:effectRef>
+          <a:fontRef idx="minor">
+            <a:schemeClr val="lt1"/>
+          </a:fontRef>
+        </p:style>
+        <p:txBody>
+          <a:bodyPr rtlCol="0" anchor="ctr"/>
+          <a:lstStyle/>
+          <a:p>
+            <a:pPr algn="ctr"/>
+            <a:endParaRPr lang="zh-CN" altLang="en-US"/>
+          </a:p>
+        </p:txBody>
+      </p:sp>
+      <p:sp>
+        <p:nvSpPr>
+          <p:cNvPr id="16" name="文本框 15">
+            <a:extLst>
+              <a:ext uri="{FF2B5EF4-FFF2-40B4-BE49-F238E27FC236}">
+                <a16:creationId xmlns:a16="http://schemas.microsoft.com/office/drawing/2014/main" id="{FC5DF083-0E9E-93D4-A1B8-93C32AB95CCD}"/>
               </a:ext>
             </a:extLst>
           </p:cNvPr>
@@ -4060,7 +4654,331 @@
         </p:nvSpPr>
         <p:spPr>
           <a:xfrm>
-            <a:off x="5890286" y="1350090"/>
+            <a:off x="4852738" y="1373685"/>
+            <a:ext cx="609599" cy="461665"/>
+          </a:xfrm>
+          <a:prstGeom prst="rect">
+            <a:avLst/>
+          </a:prstGeom>
+          <a:noFill/>
+        </p:spPr>
+        <p:txBody>
+          <a:bodyPr wrap="square" rtlCol="0">
+            <a:spAutoFit/>
+          </a:bodyPr>
+          <a:lstStyle/>
+          <a:p>
+            <a:r>
+              <a:rPr lang="en-US" altLang="zh-CN" sz="2400" b="1" dirty="0">
+                <a:latin typeface="黑体" panose="02010609060101010101" pitchFamily="49" charset="-122"/>
+                <a:ea typeface="黑体" panose="02010609060101010101" pitchFamily="49" charset="-122"/>
+              </a:rPr>
+              <a:t>B1</a:t>
+            </a:r>
+          </a:p>
+        </p:txBody>
+      </p:sp>
+      <p:sp>
+        <p:nvSpPr>
+          <p:cNvPr id="17" name="文本框 16">
+            <a:extLst>
+              <a:ext uri="{FF2B5EF4-FFF2-40B4-BE49-F238E27FC236}">
+                <a16:creationId xmlns:a16="http://schemas.microsoft.com/office/drawing/2014/main" id="{73215544-D3BA-4F15-09DD-5265762E99FD}"/>
+              </a:ext>
+            </a:extLst>
+          </p:cNvPr>
+          <p:cNvSpPr txBox="1"/>
+          <p:nvPr/>
+        </p:nvSpPr>
+        <p:spPr>
+          <a:xfrm>
+            <a:off x="6490755" y="1834811"/>
+            <a:ext cx="609599" cy="461665"/>
+          </a:xfrm>
+          <a:prstGeom prst="rect">
+            <a:avLst/>
+          </a:prstGeom>
+          <a:noFill/>
+        </p:spPr>
+        <p:txBody>
+          <a:bodyPr wrap="square" rtlCol="0">
+            <a:spAutoFit/>
+          </a:bodyPr>
+          <a:lstStyle/>
+          <a:p>
+            <a:r>
+              <a:rPr lang="en-US" altLang="zh-CN" sz="2400" b="1" dirty="0">
+                <a:latin typeface="黑体" panose="02010609060101010101" pitchFamily="49" charset="-122"/>
+                <a:ea typeface="黑体" panose="02010609060101010101" pitchFamily="49" charset="-122"/>
+              </a:rPr>
+              <a:t>B2</a:t>
+            </a:r>
+          </a:p>
+        </p:txBody>
+      </p:sp>
+      <p:sp>
+        <p:nvSpPr>
+          <p:cNvPr id="18" name="文本框 17">
+            <a:extLst>
+              <a:ext uri="{FF2B5EF4-FFF2-40B4-BE49-F238E27FC236}">
+                <a16:creationId xmlns:a16="http://schemas.microsoft.com/office/drawing/2014/main" id="{E6ED6A5A-2EC1-8FD7-0EB5-55C22A4D5F48}"/>
+              </a:ext>
+            </a:extLst>
+          </p:cNvPr>
+          <p:cNvSpPr txBox="1"/>
+          <p:nvPr/>
+        </p:nvSpPr>
+        <p:spPr>
+          <a:xfrm>
+            <a:off x="5719588" y="1091494"/>
+            <a:ext cx="609599" cy="461665"/>
+          </a:xfrm>
+          <a:prstGeom prst="rect">
+            <a:avLst/>
+          </a:prstGeom>
+          <a:noFill/>
+        </p:spPr>
+        <p:txBody>
+          <a:bodyPr wrap="square" rtlCol="0">
+            <a:spAutoFit/>
+          </a:bodyPr>
+          <a:lstStyle/>
+          <a:p>
+            <a:r>
+              <a:rPr lang="en-US" altLang="zh-CN" sz="2400" b="1" dirty="0">
+                <a:latin typeface="黑体" panose="02010609060101010101" pitchFamily="49" charset="-122"/>
+                <a:ea typeface="黑体" panose="02010609060101010101" pitchFamily="49" charset="-122"/>
+              </a:rPr>
+              <a:t>B3</a:t>
+            </a:r>
+          </a:p>
+        </p:txBody>
+      </p:sp>
+      <p:sp>
+        <p:nvSpPr>
+          <p:cNvPr id="19" name="文本框 18">
+            <a:extLst>
+              <a:ext uri="{FF2B5EF4-FFF2-40B4-BE49-F238E27FC236}">
+                <a16:creationId xmlns:a16="http://schemas.microsoft.com/office/drawing/2014/main" id="{F1BFE347-A597-47B2-2A71-264FC69EAE68}"/>
+              </a:ext>
+            </a:extLst>
+          </p:cNvPr>
+          <p:cNvSpPr txBox="1"/>
+          <p:nvPr/>
+        </p:nvSpPr>
+        <p:spPr>
+          <a:xfrm>
+            <a:off x="3290388" y="1957363"/>
+            <a:ext cx="609599" cy="461665"/>
+          </a:xfrm>
+          <a:prstGeom prst="rect">
+            <a:avLst/>
+          </a:prstGeom>
+          <a:noFill/>
+        </p:spPr>
+        <p:txBody>
+          <a:bodyPr wrap="square" rtlCol="0">
+            <a:spAutoFit/>
+          </a:bodyPr>
+          <a:lstStyle/>
+          <a:p>
+            <a:r>
+              <a:rPr lang="en-US" altLang="zh-CN" sz="2400" b="1" dirty="0">
+                <a:latin typeface="黑体" panose="02010609060101010101" pitchFamily="49" charset="-122"/>
+                <a:ea typeface="黑体" panose="02010609060101010101" pitchFamily="49" charset="-122"/>
+              </a:rPr>
+              <a:t>A1</a:t>
+            </a:r>
+          </a:p>
+        </p:txBody>
+      </p:sp>
+      <p:sp>
+        <p:nvSpPr>
+          <p:cNvPr id="20" name="文本框 19">
+            <a:extLst>
+              <a:ext uri="{FF2B5EF4-FFF2-40B4-BE49-F238E27FC236}">
+                <a16:creationId xmlns:a16="http://schemas.microsoft.com/office/drawing/2014/main" id="{FD80D2B7-1B92-758E-E435-5F419DBB0FCE}"/>
+              </a:ext>
+            </a:extLst>
+          </p:cNvPr>
+          <p:cNvSpPr txBox="1"/>
+          <p:nvPr/>
+        </p:nvSpPr>
+        <p:spPr>
+          <a:xfrm>
+            <a:off x="5752231" y="4237749"/>
+            <a:ext cx="609599" cy="461665"/>
+          </a:xfrm>
+          <a:prstGeom prst="rect">
+            <a:avLst/>
+          </a:prstGeom>
+          <a:noFill/>
+        </p:spPr>
+        <p:txBody>
+          <a:bodyPr wrap="square" rtlCol="0">
+            <a:spAutoFit/>
+          </a:bodyPr>
+          <a:lstStyle/>
+          <a:p>
+            <a:r>
+              <a:rPr lang="en-US" altLang="zh-CN" sz="2400" b="1" dirty="0">
+                <a:latin typeface="黑体" panose="02010609060101010101" pitchFamily="49" charset="-122"/>
+                <a:ea typeface="黑体" panose="02010609060101010101" pitchFamily="49" charset="-122"/>
+              </a:rPr>
+              <a:t>K1</a:t>
+            </a:r>
+          </a:p>
+        </p:txBody>
+      </p:sp>
+      <p:cxnSp>
+        <p:nvCxnSpPr>
+          <p:cNvPr id="24" name="直接箭头连接符 23">
+            <a:extLst>
+              <a:ext uri="{FF2B5EF4-FFF2-40B4-BE49-F238E27FC236}">
+                <a16:creationId xmlns:a16="http://schemas.microsoft.com/office/drawing/2014/main" id="{7EB1DAE5-5BAE-493B-9ED9-DA6C876D9EC3}"/>
+              </a:ext>
+            </a:extLst>
+          </p:cNvPr>
+          <p:cNvCxnSpPr>
+            <a:cxnSpLocks/>
+          </p:cNvCxnSpPr>
+          <p:nvPr/>
+        </p:nvCxnSpPr>
+        <p:spPr>
+          <a:xfrm>
+            <a:off x="5923194" y="2065643"/>
+            <a:ext cx="405993" cy="2143009"/>
+          </a:xfrm>
+          <a:prstGeom prst="straightConnector1">
+            <a:avLst/>
+          </a:prstGeom>
+          <a:ln w="50800">
+            <a:solidFill>
+              <a:srgbClr val="FF0000"/>
+            </a:solidFill>
+            <a:tailEnd type="triangle"/>
+          </a:ln>
+        </p:spPr>
+        <p:style>
+          <a:lnRef idx="1">
+            <a:schemeClr val="accent1"/>
+          </a:lnRef>
+          <a:fillRef idx="0">
+            <a:schemeClr val="accent1"/>
+          </a:fillRef>
+          <a:effectRef idx="0">
+            <a:schemeClr val="accent1"/>
+          </a:effectRef>
+          <a:fontRef idx="minor">
+            <a:schemeClr val="tx1"/>
+          </a:fontRef>
+        </p:style>
+      </p:cxnSp>
+      <p:cxnSp>
+        <p:nvCxnSpPr>
+          <p:cNvPr id="26" name="直接箭头连接符 25">
+            <a:extLst>
+              <a:ext uri="{FF2B5EF4-FFF2-40B4-BE49-F238E27FC236}">
+                <a16:creationId xmlns:a16="http://schemas.microsoft.com/office/drawing/2014/main" id="{5337599A-D2DA-3A3C-58E6-157EB96F186A}"/>
+              </a:ext>
+            </a:extLst>
+          </p:cNvPr>
+          <p:cNvCxnSpPr>
+            <a:cxnSpLocks/>
+          </p:cNvCxnSpPr>
+          <p:nvPr/>
+        </p:nvCxnSpPr>
+        <p:spPr>
+          <a:xfrm flipH="1">
+            <a:off x="6033625" y="4208652"/>
+            <a:ext cx="340392" cy="58194"/>
+          </a:xfrm>
+          <a:prstGeom prst="straightConnector1">
+            <a:avLst/>
+          </a:prstGeom>
+          <a:ln w="50800">
+            <a:solidFill>
+              <a:srgbClr val="FF0000"/>
+            </a:solidFill>
+            <a:tailEnd type="triangle"/>
+          </a:ln>
+        </p:spPr>
+        <p:style>
+          <a:lnRef idx="1">
+            <a:schemeClr val="accent1"/>
+          </a:lnRef>
+          <a:fillRef idx="0">
+            <a:schemeClr val="accent1"/>
+          </a:fillRef>
+          <a:effectRef idx="0">
+            <a:schemeClr val="accent1"/>
+          </a:effectRef>
+          <a:fontRef idx="minor">
+            <a:schemeClr val="tx1"/>
+          </a:fontRef>
+        </p:style>
+      </p:cxnSp>
+      <p:cxnSp>
+        <p:nvCxnSpPr>
+          <p:cNvPr id="28" name="直接箭头连接符 27">
+            <a:extLst>
+              <a:ext uri="{FF2B5EF4-FFF2-40B4-BE49-F238E27FC236}">
+                <a16:creationId xmlns:a16="http://schemas.microsoft.com/office/drawing/2014/main" id="{C1762D16-626E-7C2A-CE26-21A245DBD5BA}"/>
+              </a:ext>
+            </a:extLst>
+          </p:cNvPr>
+          <p:cNvCxnSpPr>
+            <a:cxnSpLocks/>
+            <a:endCxn id="15" idx="6"/>
+          </p:cNvCxnSpPr>
+          <p:nvPr/>
+        </p:nvCxnSpPr>
+        <p:spPr>
+          <a:xfrm>
+            <a:off x="5879498" y="2113465"/>
+            <a:ext cx="193828" cy="2134515"/>
+          </a:xfrm>
+          <a:prstGeom prst="straightConnector1">
+            <a:avLst/>
+          </a:prstGeom>
+          <a:ln w="41275">
+            <a:solidFill>
+              <a:schemeClr val="accent2"/>
+            </a:solidFill>
+            <a:prstDash val="lgDash"/>
+            <a:tailEnd type="triangle"/>
+          </a:ln>
+        </p:spPr>
+        <p:style>
+          <a:lnRef idx="1">
+            <a:schemeClr val="accent1"/>
+          </a:lnRef>
+          <a:fillRef idx="0">
+            <a:schemeClr val="accent1"/>
+          </a:fillRef>
+          <a:effectRef idx="0">
+            <a:schemeClr val="accent1"/>
+          </a:effectRef>
+          <a:fontRef idx="minor">
+            <a:schemeClr val="tx1"/>
+          </a:fontRef>
+        </p:style>
+      </p:cxnSp>
+      <p:sp>
+        <p:nvSpPr>
+          <p:cNvPr id="29" name="文本框 28">
+            <a:extLst>
+              <a:ext uri="{FF2B5EF4-FFF2-40B4-BE49-F238E27FC236}">
+                <a16:creationId xmlns:a16="http://schemas.microsoft.com/office/drawing/2014/main" id="{A6C1388D-BB66-07F1-21F8-EA410C9499FC}"/>
+              </a:ext>
+            </a:extLst>
+          </p:cNvPr>
+          <p:cNvSpPr txBox="1"/>
+          <p:nvPr/>
+        </p:nvSpPr>
+        <p:spPr>
+          <a:xfrm>
+            <a:off x="5779572" y="1627889"/>
             <a:ext cx="609599" cy="461665"/>
           </a:xfrm>
           <a:prstGeom prst="rect">
@@ -4089,7 +5007,7 @@
           <p:cNvPr id="30" name="文本框 29">
             <a:extLst>
               <a:ext uri="{FF2B5EF4-FFF2-40B4-BE49-F238E27FC236}">
-                <a16:creationId xmlns:a16="http://schemas.microsoft.com/office/drawing/2014/main" id="{3E800860-E1A1-DF01-E4D7-9DEBE7F2239B}"/>
+                <a16:creationId xmlns:a16="http://schemas.microsoft.com/office/drawing/2014/main" id="{EC084E5B-C529-16AE-7C7D-E2410ABEF9C0}"/>
               </a:ext>
             </a:extLst>
           </p:cNvPr>
@@ -4098,7 +5016,7 @@
         </p:nvSpPr>
         <p:spPr>
           <a:xfrm>
-            <a:off x="6679621" y="5602378"/>
+            <a:off x="6394474" y="4143470"/>
             <a:ext cx="609599" cy="461665"/>
           </a:xfrm>
           <a:prstGeom prst="rect">
@@ -4127,7 +5045,7 @@
           <p:cNvPr id="31" name="文本框 30">
             <a:extLst>
               <a:ext uri="{FF2B5EF4-FFF2-40B4-BE49-F238E27FC236}">
-                <a16:creationId xmlns:a16="http://schemas.microsoft.com/office/drawing/2014/main" id="{26B9EC2A-BF0C-AAB6-F16F-419D17A7F77D}"/>
+                <a16:creationId xmlns:a16="http://schemas.microsoft.com/office/drawing/2014/main" id="{8539AD3B-F6E7-349C-9FC6-A5E3A50A7B8E}"/>
               </a:ext>
             </a:extLst>
           </p:cNvPr>
@@ -4136,7 +5054,7 @@
         </p:nvSpPr>
         <p:spPr>
           <a:xfrm>
-            <a:off x="3619992" y="1438897"/>
+            <a:off x="4171328" y="1668846"/>
             <a:ext cx="609599" cy="461665"/>
           </a:xfrm>
           <a:prstGeom prst="rect">
@@ -4185,7 +5103,7 @@
           <p:cNvPr id="32" name="文本框 31">
             <a:extLst>
               <a:ext uri="{FF2B5EF4-FFF2-40B4-BE49-F238E27FC236}">
-                <a16:creationId xmlns:a16="http://schemas.microsoft.com/office/drawing/2014/main" id="{7536686A-DE30-873D-03D0-4A74135222BE}"/>
+                <a16:creationId xmlns:a16="http://schemas.microsoft.com/office/drawing/2014/main" id="{1F960AA7-731A-309E-EB77-AC812E737784}"/>
               </a:ext>
             </a:extLst>
           </p:cNvPr>
@@ -4194,7 +5112,7 @@
         </p:nvSpPr>
         <p:spPr>
           <a:xfrm>
-            <a:off x="3893152" y="3746987"/>
+            <a:off x="4575124" y="3246018"/>
             <a:ext cx="609599" cy="461665"/>
           </a:xfrm>
           <a:prstGeom prst="rect">
@@ -4238,10 +5156,148 @@
           </a:p>
         </p:txBody>
       </p:sp>
+      <p:sp>
+        <p:nvSpPr>
+          <p:cNvPr id="15" name="流程图: 接点 14">
+            <a:extLst>
+              <a:ext uri="{FF2B5EF4-FFF2-40B4-BE49-F238E27FC236}">
+                <a16:creationId xmlns:a16="http://schemas.microsoft.com/office/drawing/2014/main" id="{CEB63C25-ADA1-56CB-F184-5E5E4624D0AC}"/>
+              </a:ext>
+            </a:extLst>
+          </p:cNvPr>
+          <p:cNvSpPr/>
+          <p:nvPr/>
+        </p:nvSpPr>
+        <p:spPr>
+          <a:xfrm>
+            <a:off x="6013168" y="4213890"/>
+            <a:ext cx="60158" cy="68179"/>
+          </a:xfrm>
+          <a:prstGeom prst="flowChartConnector">
+            <a:avLst/>
+          </a:prstGeom>
+        </p:spPr>
+        <p:style>
+          <a:lnRef idx="2">
+            <a:schemeClr val="dk1">
+              <a:shade val="15000"/>
+            </a:schemeClr>
+          </a:lnRef>
+          <a:fillRef idx="1">
+            <a:schemeClr val="dk1"/>
+          </a:fillRef>
+          <a:effectRef idx="0">
+            <a:schemeClr val="dk1"/>
+          </a:effectRef>
+          <a:fontRef idx="minor">
+            <a:schemeClr val="lt1"/>
+          </a:fontRef>
+        </p:style>
+        <p:txBody>
+          <a:bodyPr rtlCol="0" anchor="ctr"/>
+          <a:lstStyle/>
+          <a:p>
+            <a:pPr algn="ctr"/>
+            <a:endParaRPr lang="zh-CN" altLang="en-US"/>
+          </a:p>
+        </p:txBody>
+      </p:sp>
+      <p:sp>
+        <p:nvSpPr>
+          <p:cNvPr id="12" name="流程图: 接点 11">
+            <a:extLst>
+              <a:ext uri="{FF2B5EF4-FFF2-40B4-BE49-F238E27FC236}">
+                <a16:creationId xmlns:a16="http://schemas.microsoft.com/office/drawing/2014/main" id="{045A1E53-5F84-CCE8-CDA7-84DE8F55FEAA}"/>
+              </a:ext>
+            </a:extLst>
+          </p:cNvPr>
+          <p:cNvSpPr/>
+          <p:nvPr/>
+        </p:nvSpPr>
+        <p:spPr>
+          <a:xfrm>
+            <a:off x="5863036" y="2045041"/>
+            <a:ext cx="60158" cy="68179"/>
+          </a:xfrm>
+          <a:prstGeom prst="flowChartConnector">
+            <a:avLst/>
+          </a:prstGeom>
+        </p:spPr>
+        <p:style>
+          <a:lnRef idx="2">
+            <a:schemeClr val="dk1">
+              <a:shade val="15000"/>
+            </a:schemeClr>
+          </a:lnRef>
+          <a:fillRef idx="1">
+            <a:schemeClr val="dk1"/>
+          </a:fillRef>
+          <a:effectRef idx="0">
+            <a:schemeClr val="dk1"/>
+          </a:effectRef>
+          <a:fontRef idx="minor">
+            <a:schemeClr val="lt1"/>
+          </a:fontRef>
+        </p:style>
+        <p:txBody>
+          <a:bodyPr rtlCol="0" anchor="ctr"/>
+          <a:lstStyle/>
+          <a:p>
+            <a:pPr algn="ctr"/>
+            <a:endParaRPr lang="zh-CN" altLang="en-US"/>
+          </a:p>
+        </p:txBody>
+      </p:sp>
+      <p:sp>
+        <p:nvSpPr>
+          <p:cNvPr id="39" name="流程图: 接点 38">
+            <a:extLst>
+              <a:ext uri="{FF2B5EF4-FFF2-40B4-BE49-F238E27FC236}">
+                <a16:creationId xmlns:a16="http://schemas.microsoft.com/office/drawing/2014/main" id="{907D332F-8F3A-61E5-E0B0-0A8F4CB668E4}"/>
+              </a:ext>
+            </a:extLst>
+          </p:cNvPr>
+          <p:cNvSpPr/>
+          <p:nvPr/>
+        </p:nvSpPr>
+        <p:spPr>
+          <a:xfrm>
+            <a:off x="6299021" y="4150651"/>
+            <a:ext cx="60158" cy="68179"/>
+          </a:xfrm>
+          <a:prstGeom prst="flowChartConnector">
+            <a:avLst/>
+          </a:prstGeom>
+        </p:spPr>
+        <p:style>
+          <a:lnRef idx="2">
+            <a:schemeClr val="dk1">
+              <a:shade val="15000"/>
+            </a:schemeClr>
+          </a:lnRef>
+          <a:fillRef idx="1">
+            <a:schemeClr val="dk1"/>
+          </a:fillRef>
+          <a:effectRef idx="0">
+            <a:schemeClr val="dk1"/>
+          </a:effectRef>
+          <a:fontRef idx="minor">
+            <a:schemeClr val="lt1"/>
+          </a:fontRef>
+        </p:style>
+        <p:txBody>
+          <a:bodyPr rtlCol="0" anchor="ctr"/>
+          <a:lstStyle/>
+          <a:p>
+            <a:pPr algn="ctr"/>
+            <a:endParaRPr lang="zh-CN" altLang="en-US"/>
+          </a:p>
+        </p:txBody>
+      </p:sp>
     </p:spTree>
     <p:extLst>
       <p:ext uri="{BB962C8B-B14F-4D97-AF65-F5344CB8AC3E}">
-        <p14:creationId xmlns:p14="http://schemas.microsoft.com/office/powerpoint/2010/main" val="2552100656"/>
+        <p14:creationId xmlns:p14="http://schemas.microsoft.com/office/powerpoint/2010/main" val="2796279430"/>
       </p:ext>
     </p:extLst>
   </p:cSld>
